--- a/assets/ppts/M4.3_Data_Signals_Channel_Capacity.pptx
+++ b/assets/ppts/M4.3_Data_Signals_Channel_Capacity.pptx
@@ -8,6 +8,8 @@
     <p:sldId id="256" r:id="rId7"/>
     <p:sldId id="257" r:id="rId8"/>
     <p:sldId id="258" r:id="rId9"/>
+    <p:sldId id="259" r:id="rId10"/>
+    <p:sldId id="260" r:id="rId11"/>
   </p:sldIdLst>
   <p:sldSz cx="12191695" cy="6858000" type="screen4x3"/>
   <p:notesSz cx="6858000" cy="9144000"/>
@@ -3141,8 +3143,8 @@
         </p:nvSpPr>
         <p:spPr>
           <a:xfrm>
-            <a:off x="822960" y="1188720"/>
-            <a:ext cx="164592" cy="4480560"/>
+            <a:off x="0" y="0"/>
+            <a:ext cx="12191695" cy="137160"/>
           </a:xfrm>
           <a:prstGeom prst="rect">
             <a:avLst/>
@@ -3178,14 +3180,57 @@
       </p:sp>
       <p:sp>
         <p:nvSpPr>
-          <p:cNvPr id="4" name="TextBox 3"/>
+          <p:cNvPr id="4" name="Rectangle 3"/>
+          <p:cNvSpPr/>
+          <p:nvPr/>
+        </p:nvSpPr>
+        <p:spPr>
+          <a:xfrm>
+            <a:off x="822960" y="1097280"/>
+            <a:ext cx="164592" cy="4663440"/>
+          </a:xfrm>
+          <a:prstGeom prst="rect">
+            <a:avLst/>
+          </a:prstGeom>
+          <a:solidFill>
+            <a:srgbClr val="D97706"/>
+          </a:solidFill>
+          <a:ln>
+            <a:noFill/>
+          </a:ln>
+        </p:spPr>
+        <p:style>
+          <a:lnRef idx="1">
+            <a:schemeClr val="accent1"/>
+          </a:lnRef>
+          <a:fillRef idx="3">
+            <a:schemeClr val="accent1"/>
+          </a:fillRef>
+          <a:effectRef idx="2">
+            <a:schemeClr val="accent1"/>
+          </a:effectRef>
+          <a:fontRef idx="minor">
+            <a:schemeClr val="lt1"/>
+          </a:fontRef>
+        </p:style>
+        <p:txBody>
+          <a:bodyPr rtlCol="0" anchor="ctr"/>
+          <a:lstStyle/>
+          <a:p>
+            <a:pPr algn="ctr"/>
+          </a:p>
+        </p:txBody>
+      </p:sp>
+      <p:sp>
+        <p:nvSpPr>
+          <p:cNvPr id="5" name="TextBox 4"/>
           <p:cNvSpPr txBox="1"/>
           <p:nvPr/>
         </p:nvSpPr>
         <p:spPr>
           <a:xfrm>
-            <a:off x="1280160" y="1097280"/>
-            <a:ext cx="10058400" cy="4663440"/>
+            <a:off x="1234440" y="1005840"/>
+            <a:ext cx="10241280" cy="4846320"/>
           </a:xfrm>
           <a:prstGeom prst="rect">
             <a:avLst/>
@@ -3200,70 +3245,165 @@
           <a:p>
             <a:pPr>
               <a:spcAft>
+                <a:spcPts val="1000"/>
+              </a:spcAft>
+              <a:defRPr b="1" sz="1300">
+                <a:solidFill>
+                  <a:srgbClr val="D97706"/>
+                </a:solidFill>
+              </a:defRPr>
+            </a:pPr>
+            <a:r>
+              <a:t>PCCST501 Computer Networks | KTU 2024 Scheme • MODULE 4 • M4.3</a:t>
+            </a:r>
+          </a:p>
+          <a:p>
+            <a:pPr>
+              <a:spcAft>
                 <a:spcPts val="1200"/>
               </a:spcAft>
-              <a:defRPr b="1" sz="1300">
+              <a:defRPr b="1" sz="3000">
+                <a:solidFill>
+                  <a:srgbClr val="F8FAFC"/>
+                </a:solidFill>
+              </a:defRPr>
+            </a:pPr>
+            <a:r>
+              <a:t>Data and Signals: Theoretical Channel Capacity</a:t>
+            </a:r>
+          </a:p>
+          <a:p>
+            <a:pPr>
+              <a:spcAft>
+                <a:spcPts val="2400"/>
+              </a:spcAft>
+              <a:defRPr sz="1600">
+                <a:solidFill>
+                  <a:srgbClr val="94A3B8"/>
+                </a:solidFill>
+              </a:defRPr>
+            </a:pPr>
+            <a:r>
+              <a:t>Analog vs Digital Signals, Bandwidth, Transmission Impairments (Attenuation, Noise), Signal-to-Noise Ratio (SNR), Nyquist Rate vs Shannon Capacity</a:t>
+            </a:r>
+          </a:p>
+          <a:p>
+            <a:pPr>
+              <a:spcAft>
+                <a:spcPts val="300"/>
+              </a:spcAft>
+              <a:defRPr b="1" sz="1350">
+                <a:solidFill>
+                  <a:srgbClr val="E2E8F0"/>
+                </a:solidFill>
+              </a:defRPr>
+            </a:pPr>
+            <a:r>
+              <a:t>Prepared by: Prof. Anju Markose | Assistant Professor, Dept. of CSE | VJCET</a:t>
+            </a:r>
+          </a:p>
+          <a:p>
+            <a:pPr>
+              <a:defRPr sz="1150">
+                <a:solidFill>
+                  <a:srgbClr val="94A3B8"/>
+                </a:solidFill>
+              </a:defRPr>
+            </a:pPr>
+            <a:r>
+              <a:t>Viswajyothi College of Engineering and Technology (VJCET), Vazhakulam • KTU S5 CSE</a:t>
+            </a:r>
+          </a:p>
+        </p:txBody>
+      </p:sp>
+      <p:sp>
+        <p:nvSpPr>
+          <p:cNvPr id="6" name="Rounded Rectangle 5"/>
+          <p:cNvSpPr/>
+          <p:nvPr/>
+        </p:nvSpPr>
+        <p:spPr>
+          <a:xfrm>
+            <a:off x="8412480" y="5120640"/>
+            <a:ext cx="3017520" cy="822960"/>
+          </a:xfrm>
+          <a:prstGeom prst="roundRect">
+            <a:avLst/>
+          </a:prstGeom>
+          <a:solidFill>
+            <a:srgbClr val="1E293B"/>
+          </a:solidFill>
+          <a:ln w="12700">
+            <a:solidFill>
+              <a:srgbClr val="0E7490"/>
+            </a:solidFill>
+          </a:ln>
+        </p:spPr>
+        <p:style>
+          <a:lnRef idx="1">
+            <a:schemeClr val="accent1"/>
+          </a:lnRef>
+          <a:fillRef idx="3">
+            <a:schemeClr val="accent1"/>
+          </a:fillRef>
+          <a:effectRef idx="2">
+            <a:schemeClr val="accent1"/>
+          </a:effectRef>
+          <a:fontRef idx="minor">
+            <a:schemeClr val="lt1"/>
+          </a:fontRef>
+        </p:style>
+        <p:txBody>
+          <a:bodyPr rtlCol="0" anchor="ctr"/>
+          <a:lstStyle/>
+          <a:p>
+            <a:pPr algn="ctr"/>
+          </a:p>
+        </p:txBody>
+      </p:sp>
+      <p:sp>
+        <p:nvSpPr>
+          <p:cNvPr id="7" name="TextBox 6"/>
+          <p:cNvSpPr txBox="1"/>
+          <p:nvPr/>
+        </p:nvSpPr>
+        <p:spPr>
+          <a:xfrm>
+            <a:off x="8503920" y="5166360"/>
+            <a:ext cx="2834640" cy="731520"/>
+          </a:xfrm>
+          <a:prstGeom prst="rect">
+            <a:avLst/>
+          </a:prstGeom>
+          <a:noFill/>
+        </p:spPr>
+        <p:txBody>
+          <a:bodyPr wrap="none">
+            <a:spAutoFit/>
+          </a:bodyPr>
+          <a:lstStyle/>
+          <a:p>
+            <a:pPr>
+              <a:defRPr b="1" sz="1050">
                 <a:solidFill>
                   <a:srgbClr val="D97706"/>
                 </a:solidFill>
               </a:defRPr>
             </a:pPr>
             <a:r>
-              <a:t>PCCST501 Computer Networks | KTU 2024 Scheme • MODULE 4 • M4.3</a:t>
-            </a:r>
-          </a:p>
-          <a:p>
-            <a:pPr>
-              <a:spcAft>
-                <a:spcPts val="1400"/>
-              </a:spcAft>
-              <a:defRPr b="1" sz="3200">
+              <a:t>KTU B.Tech Curriculum</a:t>
+            </a:r>
+          </a:p>
+          <a:p>
+            <a:pPr>
+              <a:defRPr sz="950">
                 <a:solidFill>
                   <a:srgbClr val="F8FAFC"/>
                 </a:solidFill>
               </a:defRPr>
             </a:pPr>
             <a:r>
-              <a:t>Physical Layer: Data, Signals &amp; Capacity Limits</a:t>
-            </a:r>
-          </a:p>
-          <a:p>
-            <a:pPr>
-              <a:spcAft>
-                <a:spcPts val="2800"/>
-              </a:spcAft>
-              <a:defRPr sz="1700">
-                <a:solidFill>
-                  <a:srgbClr val="94A3B8"/>
-                </a:solidFill>
-              </a:defRPr>
-            </a:pPr>
-            <a:r>
-              <a:t>Analog vs Digital Signals, Fourier Decomposition, Transmission Impairments, Nyquist Bit Rate &amp; Shannon Capacity Theorem</a:t>
-            </a:r>
-          </a:p>
-          <a:p>
-            <a:pPr>
-              <a:defRPr b="1" sz="1300">
-                <a:solidFill>
-                  <a:srgbClr val="E2E8F0"/>
-                </a:solidFill>
-              </a:defRPr>
-            </a:pPr>
-            <a:r>
-              <a:t>Prepared by: Prof. Anju Markose | Assistant Professor, Dept. of CSE | VJCET</a:t>
-            </a:r>
-          </a:p>
-          <a:p>
-            <a:pPr>
-              <a:defRPr sz="1100">
-                <a:solidFill>
-                  <a:srgbClr val="94A3B8"/>
-                </a:solidFill>
-              </a:defRPr>
-            </a:pPr>
-            <a:r>
-              <a:t>Viswajyothi College of Engineering and Technology (VJCET), Vazhakulam</a:t>
+              <a:t>Official Classroom Slide Deck</a:t>
             </a:r>
           </a:p>
         </p:txBody>
@@ -3395,14 +3535,14 @@
           <a:lstStyle/>
           <a:p>
             <a:pPr>
-              <a:defRPr b="1" sz="2300">
+              <a:defRPr b="1" sz="2200">
                 <a:solidFill>
                   <a:srgbClr val="F8FAFC"/>
                 </a:solidFill>
               </a:defRPr>
             </a:pPr>
             <a:r>
-              <a:t>4.3.1 Data, Signals &amp; Transmission Impairments</a:t>
+              <a:t>4.3.1 Signals, Bandwidth &amp; Transmission Impairments</a:t>
             </a:r>
           </a:p>
         </p:txBody>
@@ -3437,7 +3577,7 @@
               </a:defRPr>
             </a:pPr>
             <a:r>
-              <a:t>M4.3 SIGNALS &amp; IMPAIRMENTS</a:t>
+              <a:t>M4.3 DATA &amp; SIGNALS</a:t>
             </a:r>
           </a:p>
         </p:txBody>
@@ -3450,7 +3590,7 @@
         </p:nvSpPr>
         <p:spPr>
           <a:xfrm>
-            <a:off x="731520" y="1280160"/>
+            <a:off x="731520" y="1234440"/>
             <a:ext cx="6858000" cy="4937760"/>
           </a:xfrm>
           <a:prstGeom prst="rect">
@@ -3468,7 +3608,7 @@
               <a:spcAft>
                 <a:spcPts val="200"/>
               </a:spcAft>
-              <a:defRPr b="1" sz="1500">
+              <a:defRPr b="1" sz="1450">
                 <a:solidFill>
                   <a:srgbClr val="0F1E4A"/>
                 </a:solidFill>
@@ -3481,16 +3621,16 @@
           <a:p>
             <a:pPr>
               <a:spcAft>
-                <a:spcPts val="800"/>
+                <a:spcPts val="700"/>
               </a:spcAft>
-              <a:defRPr sz="1300">
-                <a:solidFill>
-                  <a:srgbClr val="1E293B"/>
-                </a:solidFill>
-              </a:defRPr>
-            </a:pPr>
-            <a:r>
-              <a:t>   Analog: Continuous signal waveform over time with infinite voltage levels. Digital: Discrete discrete voltage levels representing binary 0s and 1s.</a:t>
+              <a:defRPr sz="1250">
+                <a:solidFill>
+                  <a:srgbClr val="0F172A"/>
+                </a:solidFill>
+              </a:defRPr>
+            </a:pPr>
+            <a:r>
+              <a:t>   Analog signals have infinitely many continuous values over time (e.g., sine wave $s(t) = A \sin(2\pi f t + \phi)$). Digital signals have discrete discrete levels (e.g., 0V and 5V pulses representing bits 0 and 1).</a:t>
             </a:r>
           </a:p>
           <a:p>
@@ -3498,29 +3638,29 @@
               <a:spcAft>
                 <a:spcPts val="200"/>
               </a:spcAft>
-              <a:defRPr b="1" sz="1500">
+              <a:defRPr b="1" sz="1450">
                 <a:solidFill>
                   <a:srgbClr val="0F1E4A"/>
                 </a:solidFill>
               </a:defRPr>
             </a:pPr>
             <a:r>
-              <a:t>• Fourier Harmonic Analysis</a:t>
+              <a:t>• Bandwidth ($B$)</a:t>
             </a:r>
           </a:p>
           <a:p>
             <a:pPr>
               <a:spcAft>
-                <a:spcPts val="800"/>
+                <a:spcPts val="700"/>
               </a:spcAft>
-              <a:defRPr sz="1300">
-                <a:solidFill>
-                  <a:srgbClr val="1E293B"/>
-                </a:solidFill>
-              </a:defRPr>
-            </a:pPr>
-            <a:r>
-              <a:t>   Any periodic composite signal can be decomposed into an infinite series of fundamental and harmonic sine waves: $s(t) = \frac{A_0}{2} + \sum [A_n \sin(2\pi n f t) + B_n \cos(2\pi n f t)]$.</a:t>
+              <a:defRPr sz="1250">
+                <a:solidFill>
+                  <a:srgbClr val="0F172A"/>
+                </a:solidFill>
+              </a:defRPr>
+            </a:pPr>
+            <a:r>
+              <a:t>   The range of frequencies contained in a composite signal: $B = f_{max} - f_{min}$ Hertz (Hz).</a:t>
             </a:r>
           </a:p>
           <a:p>
@@ -3528,29 +3668,29 @@
               <a:spcAft>
                 <a:spcPts val="200"/>
               </a:spcAft>
-              <a:defRPr b="1" sz="1500">
+              <a:defRPr b="1" sz="1450">
                 <a:solidFill>
                   <a:srgbClr val="0F1E4A"/>
                 </a:solidFill>
               </a:defRPr>
             </a:pPr>
             <a:r>
-              <a:t>• Transmission Impairment 1: Attenuation</a:t>
+              <a:t>• Transmission Impairments</a:t>
             </a:r>
           </a:p>
           <a:p>
             <a:pPr>
               <a:spcAft>
-                <a:spcPts val="800"/>
+                <a:spcPts val="700"/>
               </a:spcAft>
-              <a:defRPr sz="1300">
-                <a:solidFill>
-                  <a:srgbClr val="1E293B"/>
-                </a:solidFill>
-              </a:defRPr>
-            </a:pPr>
-            <a:r>
-              <a:t>   Loss of signal energy over transmission distance. Measured in decibels (dB): $\text{dB} = 10 \log_{10} \left( \frac{P_2}{P_1} \right)$ (Negative dB = signal loss). Compensated by amplifiers / repeaters.</a:t>
+              <a:defRPr sz="1250">
+                <a:solidFill>
+                  <a:srgbClr val="0F172A"/>
+                </a:solidFill>
+              </a:defRPr>
+            </a:pPr>
+            <a:r>
+              <a:t>   1. **Attenuation**: Loss of signal energy over distance (measured in decibels $dB = 10 \log_{10} (P_2 / P_1)$). Corrected via amplifiers/repeaters. \n 2. **Distortion**: Different frequency components travel at different speeds, altering composite waveform shape. \n 3. **Noise**: Unwanted external energy added to signal (Thermal noise $N_0 = kTB$, Induced noise, Crosstalk, Impulse noise).</a:t>
             </a:r>
           </a:p>
           <a:p>
@@ -3558,59 +3698,29 @@
               <a:spcAft>
                 <a:spcPts val="200"/>
               </a:spcAft>
-              <a:defRPr b="1" sz="1500">
+              <a:defRPr b="1" sz="1450">
                 <a:solidFill>
                   <a:srgbClr val="0F1E4A"/>
                 </a:solidFill>
               </a:defRPr>
             </a:pPr>
             <a:r>
-              <a:t>• Transmission Impairment 2: Distortion</a:t>
+              <a:t>• Signal-to-Noise Ratio (SNR)</a:t>
             </a:r>
           </a:p>
           <a:p>
             <a:pPr>
               <a:spcAft>
-                <a:spcPts val="800"/>
+                <a:spcPts val="700"/>
               </a:spcAft>
-              <a:defRPr sz="1300">
-                <a:solidFill>
-                  <a:srgbClr val="1E293B"/>
-                </a:solidFill>
-              </a:defRPr>
-            </a:pPr>
-            <a:r>
-              <a:t>   Different harmonic frequency components travel at slightly different speeds in guided media, shifting relative phase and altering signal shape.</a:t>
-            </a:r>
-          </a:p>
-          <a:p>
-            <a:pPr>
-              <a:spcAft>
-                <a:spcPts val="200"/>
-              </a:spcAft>
-              <a:defRPr b="1" sz="1500">
-                <a:solidFill>
-                  <a:srgbClr val="0F1E4A"/>
-                </a:solidFill>
-              </a:defRPr>
-            </a:pPr>
-            <a:r>
-              <a:t>• Transmission Impairment 3: Noise</a:t>
-            </a:r>
-          </a:p>
-          <a:p>
-            <a:pPr>
-              <a:spcAft>
-                <a:spcPts val="800"/>
-              </a:spcAft>
-              <a:defRPr sz="1300">
-                <a:solidFill>
-                  <a:srgbClr val="1E293B"/>
-                </a:solidFill>
-              </a:defRPr>
-            </a:pPr>
-            <a:r>
-              <a:t>   Thermal noise (Johnson noise: $N = kTB$), Induced noise, Crosstalk (coupling between adjacent wires), Impulse noise (sudden spikes).</a:t>
+              <a:defRPr sz="1250">
+                <a:solidFill>
+                  <a:srgbClr val="0F172A"/>
+                </a:solidFill>
+              </a:defRPr>
+            </a:pPr>
+            <a:r>
+              <a:t>   Ratio of signal power to noise power: $SNR = \frac{P_{signal}}{P_{noise}}$. In decibels: $SNR_{dB} = 10 \log_{10} (SNR)$ (e.g., $SNR = 1000 \implies SNR_{dB} = 30$ dB).</a:t>
             </a:r>
           </a:p>
         </p:txBody>
@@ -3623,14 +3733,14 @@
         </p:nvSpPr>
         <p:spPr>
           <a:xfrm>
-            <a:off x="7955279" y="1280160"/>
-            <a:ext cx="3566160" cy="4846320"/>
+            <a:off x="7955279" y="1234440"/>
+            <a:ext cx="3566160" cy="4892040"/>
           </a:xfrm>
           <a:prstGeom prst="roundRect">
             <a:avLst/>
           </a:prstGeom>
           <a:solidFill>
-            <a:srgbClr val="F1F5F9"/>
+            <a:srgbClr val="F8FAFC"/>
           </a:solidFill>
           <a:ln w="19050">
             <a:solidFill>
@@ -3668,7 +3778,7 @@
         </p:nvSpPr>
         <p:spPr>
           <a:xfrm>
-            <a:off x="8138160" y="1417320"/>
+            <a:off x="8138160" y="1371600"/>
             <a:ext cx="3200400" cy="4572000"/>
           </a:xfrm>
           <a:prstGeom prst="rect">
@@ -3693,7 +3803,7 @@
               </a:defRPr>
             </a:pPr>
             <a:r>
-              <a:t>Decibel Formulas</a:t>
+              <a:t>Key Formulas</a:t>
             </a:r>
           </a:p>
           <a:p>
@@ -3703,12 +3813,12 @@
               </a:spcAft>
               <a:defRPr sz="1200">
                 <a:solidFill>
-                  <a:srgbClr val="1E293B"/>
-                </a:solidFill>
-              </a:defRPr>
-            </a:pPr>
-            <a:r>
-              <a:t>→ Power: dB = 10 * log10(P2 / P1)</a:t>
+                  <a:srgbClr val="0F172A"/>
+                </a:solidFill>
+              </a:defRPr>
+            </a:pPr>
+            <a:r>
+              <a:t>→ Bandwidth: B = f_max - f_min (Hz)</a:t>
             </a:r>
           </a:p>
           <a:p>
@@ -3718,12 +3828,12 @@
               </a:spcAft>
               <a:defRPr sz="1200">
                 <a:solidFill>
-                  <a:srgbClr val="1E293B"/>
-                </a:solidFill>
-              </a:defRPr>
-            </a:pPr>
-            <a:r>
-              <a:t>→ Voltage: dB = 20 * log10(V2 / V1)</a:t>
+                  <a:srgbClr val="0F172A"/>
+                </a:solidFill>
+              </a:defRPr>
+            </a:pPr>
+            <a:r>
+              <a:t>→ Decibels: dB = 10 * log10(P2 / P1)</a:t>
             </a:r>
           </a:p>
           <a:p>
@@ -3733,12 +3843,12 @@
               </a:spcAft>
               <a:defRPr sz="1200">
                 <a:solidFill>
-                  <a:srgbClr val="1E293B"/>
-                </a:solidFill>
-              </a:defRPr>
-            </a:pPr>
-            <a:r>
-              <a:t>→ Half power = -3 dB</a:t>
+                  <a:srgbClr val="0F172A"/>
+                </a:solidFill>
+              </a:defRPr>
+            </a:pPr>
+            <a:r>
+              <a:t>→ SNR = P_signal / P_noise</a:t>
             </a:r>
           </a:p>
           <a:p>
@@ -3748,12 +3858,12 @@
               </a:spcAft>
               <a:defRPr sz="1200">
                 <a:solidFill>
-                  <a:srgbClr val="1E293B"/>
-                </a:solidFill>
-              </a:defRPr>
-            </a:pPr>
-            <a:r>
-              <a:t>→ 10x power = +10 dB</a:t>
+                  <a:srgbClr val="0F172A"/>
+                </a:solidFill>
+              </a:defRPr>
+            </a:pPr>
+            <a:r>
+              <a:t>→ SNR_dB = 10 * log10(SNR)</a:t>
             </a:r>
           </a:p>
           <a:p>
@@ -3763,12 +3873,12 @@
               </a:spcAft>
               <a:defRPr sz="1200">
                 <a:solidFill>
-                  <a:srgbClr val="1E293B"/>
-                </a:solidFill>
-              </a:defRPr>
-            </a:pPr>
-            <a:r>
-              <a:t>→ 100x power = +20 dB</a:t>
+                  <a:srgbClr val="0F172A"/>
+                </a:solidFill>
+              </a:defRPr>
+            </a:pPr>
+            <a:r>
+              <a:t>→ SNR = 10^(SNR_dB / 10)</a:t>
             </a:r>
           </a:p>
         </p:txBody>
@@ -3781,8 +3891,8 @@
         </p:nvSpPr>
         <p:spPr>
           <a:xfrm>
-            <a:off x="731520" y="6309360"/>
-            <a:ext cx="10789920" cy="365760"/>
+            <a:off x="731520" y="6327648"/>
+            <a:ext cx="10789920" cy="320040"/>
           </a:xfrm>
           <a:prstGeom prst="rect">
             <a:avLst/>
@@ -3804,6 +3914,41 @@
             </a:pPr>
             <a:r>
               <a:t>PCCST501 Computer Networks | KTU 2024 Scheme | Prof. Anju Markose | Assistant Professor, Dept. of CSE | VJCET</a:t>
+            </a:r>
+          </a:p>
+        </p:txBody>
+      </p:sp>
+      <p:sp>
+        <p:nvSpPr>
+          <p:cNvPr id="10" name="TextBox 9"/>
+          <p:cNvSpPr txBox="1"/>
+          <p:nvPr/>
+        </p:nvSpPr>
+        <p:spPr>
+          <a:xfrm>
+            <a:off x="6858000" y="6327648"/>
+            <a:ext cx="4572000" cy="320040"/>
+          </a:xfrm>
+          <a:prstGeom prst="rect">
+            <a:avLst/>
+          </a:prstGeom>
+          <a:noFill/>
+        </p:spPr>
+        <p:txBody>
+          <a:bodyPr wrap="none">
+            <a:spAutoFit/>
+          </a:bodyPr>
+          <a:lstStyle/>
+          <a:p>
+            <a:pPr algn="r">
+              <a:defRPr sz="950">
+                <a:solidFill>
+                  <a:srgbClr val="64748B"/>
+                </a:solidFill>
+              </a:defRPr>
+            </a:pPr>
+            <a:r>
+              <a:t>Dept. of CSE, VJCET</a:t>
             </a:r>
           </a:p>
         </p:txBody>
@@ -3935,7 +4080,7 @@
           <a:lstStyle/>
           <a:p>
             <a:pPr>
-              <a:defRPr b="1" sz="2300">
+              <a:defRPr b="1" sz="2200">
                 <a:solidFill>
                   <a:srgbClr val="F8FAFC"/>
                 </a:solidFill>
@@ -3977,7 +4122,7 @@
               </a:defRPr>
             </a:pPr>
             <a:r>
-              <a:t>M4.3 THEORETICAL LIMITS</a:t>
+              <a:t>M4.3 NYQUIST VS SHANNON</a:t>
             </a:r>
           </a:p>
         </p:txBody>
@@ -3990,18 +4135,18 @@
         </p:nvSpPr>
         <p:spPr>
           <a:xfrm>
-            <a:off x="731520" y="1280160"/>
-            <a:ext cx="5212080" cy="4846320"/>
+            <a:off x="731520" y="1234440"/>
+            <a:ext cx="5212080" cy="4892040"/>
           </a:xfrm>
           <a:prstGeom prst="roundRect">
             <a:avLst/>
           </a:prstGeom>
           <a:solidFill>
-            <a:srgbClr val="F1F5F9"/>
+            <a:srgbClr val="F8FAFC"/>
           </a:solidFill>
           <a:ln w="19050">
             <a:solidFill>
-              <a:srgbClr val="0E7490"/>
+              <a:srgbClr val="0F1E4A"/>
             </a:solidFill>
           </a:ln>
         </p:spPr>
@@ -4035,7 +4180,7 @@
         </p:nvSpPr>
         <p:spPr>
           <a:xfrm>
-            <a:off x="914400" y="1417320"/>
+            <a:off x="914400" y="1371600"/>
             <a:ext cx="4846320" cy="4572000"/>
           </a:xfrm>
           <a:prstGeom prst="rect">
@@ -4051,9 +4196,9 @@
           <a:p>
             <a:pPr>
               <a:spcAft>
-                <a:spcPts val="1200"/>
+                <a:spcPts val="1000"/>
               </a:spcAft>
-              <a:defRPr b="1" sz="1600">
+              <a:defRPr b="1" sz="1550">
                 <a:solidFill>
                   <a:srgbClr val="0F1E4A"/>
                 </a:solidFill>
@@ -4066,76 +4211,61 @@
           <a:p>
             <a:pPr>
               <a:spcAft>
-                <a:spcPts val="600"/>
+                <a:spcPts val="500"/>
               </a:spcAft>
-              <a:defRPr sz="1250">
-                <a:solidFill>
-                  <a:srgbClr val="1E293B"/>
-                </a:solidFill>
-              </a:defRPr>
-            </a:pPr>
-            <a:r>
-              <a:t>• Condition: Ideal noiseless channel of bandwidth $B$ Hz</a:t>
+              <a:defRPr sz="1200">
+                <a:solidFill>
+                  <a:srgbClr val="0F172A"/>
+                </a:solidFill>
+              </a:defRPr>
+            </a:pPr>
+            <a:r>
+              <a:t>• Formulated By: Harry Nyquist (1928)</a:t>
             </a:r>
           </a:p>
           <a:p>
             <a:pPr>
               <a:spcAft>
-                <a:spcPts val="600"/>
+                <a:spcPts val="500"/>
               </a:spcAft>
-              <a:defRPr sz="1250">
-                <a:solidFill>
-                  <a:srgbClr val="1E293B"/>
-                </a:solidFill>
-              </a:defRPr>
-            </a:pPr>
-            <a:r>
-              <a:t>• Signal Levels: $L$ distinct discrete signal voltage levels</a:t>
+              <a:defRPr sz="1200">
+                <a:solidFill>
+                  <a:srgbClr val="0F172A"/>
+                </a:solidFill>
+              </a:defRPr>
+            </a:pPr>
+            <a:r>
+              <a:t>• Channel Condition: Assumes theoretical **noiseless** channel with bandwidth $B$ Hz and $L$ discrete signaling levels</a:t>
             </a:r>
           </a:p>
           <a:p>
             <a:pPr>
               <a:spcAft>
-                <a:spcPts val="600"/>
+                <a:spcPts val="500"/>
               </a:spcAft>
-              <a:defRPr sz="1250">
-                <a:solidFill>
-                  <a:srgbClr val="1E293B"/>
-                </a:solidFill>
-              </a:defRPr>
-            </a:pPr>
-            <a:r>
-              <a:t>• Formula: $\text{Bit Rate} = 2 \times B \times \log_2(L) \text{ bps}$</a:t>
+              <a:defRPr sz="1200">
+                <a:solidFill>
+                  <a:srgbClr val="0F172A"/>
+                </a:solidFill>
+              </a:defRPr>
+            </a:pPr>
+            <a:r>
+              <a:t>• Formula: $C = 2 \times B \times \log_2 (L)$ bps</a:t>
             </a:r>
           </a:p>
           <a:p>
             <a:pPr>
               <a:spcAft>
-                <a:spcPts val="600"/>
+                <a:spcPts val="500"/>
               </a:spcAft>
-              <a:defRPr sz="1250">
-                <a:solidFill>
-                  <a:srgbClr val="1E293B"/>
-                </a:solidFill>
-              </a:defRPr>
-            </a:pPr>
-            <a:r>
-              <a:t>• Example: Bandwidth = 3000 Hz, $L = 2 \implies \text{Bit Rate} = 2 \times 3000 \times 1 = 6000 \text{ bps}$</a:t>
-            </a:r>
-          </a:p>
-          <a:p>
-            <a:pPr>
-              <a:spcAft>
-                <a:spcPts val="600"/>
-              </a:spcAft>
-              <a:defRPr sz="1250">
-                <a:solidFill>
-                  <a:srgbClr val="1E293B"/>
-                </a:solidFill>
-              </a:defRPr>
-            </a:pPr>
-            <a:r>
-              <a:t>• Significance: Upper bound determined strictly by bandwidth and modulation levels</a:t>
+              <a:defRPr sz="1200">
+                <a:solidFill>
+                  <a:srgbClr val="0F172A"/>
+                </a:solidFill>
+              </a:defRPr>
+            </a:pPr>
+            <a:r>
+              <a:t>• Implication: Data rate can be increased indefinitely by increasing the number of signal levels $L$, but is constrained by noise in practice</a:t>
             </a:r>
           </a:p>
         </p:txBody>
@@ -4148,8 +4278,8 @@
         </p:nvSpPr>
         <p:spPr>
           <a:xfrm>
-            <a:off x="6309360" y="1280160"/>
-            <a:ext cx="5212080" cy="4846320"/>
+            <a:off x="6309360" y="1234440"/>
+            <a:ext cx="5212080" cy="4892040"/>
           </a:xfrm>
           <a:prstGeom prst="roundRect">
             <a:avLst/>
@@ -4159,7 +4289,7 @@
           </a:solidFill>
           <a:ln w="19050">
             <a:solidFill>
-              <a:srgbClr val="0F1E4A"/>
+              <a:srgbClr val="0E7490"/>
             </a:solidFill>
           </a:ln>
         </p:spPr>
@@ -4193,7 +4323,7 @@
         </p:nvSpPr>
         <p:spPr>
           <a:xfrm>
-            <a:off x="6492240" y="1417320"/>
+            <a:off x="6492240" y="1371600"/>
             <a:ext cx="4846320" cy="4572000"/>
           </a:xfrm>
           <a:prstGeom prst="rect">
@@ -4209,91 +4339,76 @@
           <a:p>
             <a:pPr>
               <a:spcAft>
-                <a:spcPts val="1200"/>
+                <a:spcPts val="1000"/>
               </a:spcAft>
-              <a:defRPr b="1" sz="1600">
+              <a:defRPr b="1" sz="1550">
                 <a:solidFill>
                   <a:srgbClr val="0E7490"/>
                 </a:solidFill>
               </a:defRPr>
             </a:pPr>
             <a:r>
-              <a:t>Shannon Capacity Theorem (Noisy Channel)</a:t>
+              <a:t>Shannon Capacity (Noisy Channel)</a:t>
             </a:r>
           </a:p>
           <a:p>
             <a:pPr>
               <a:spcAft>
-                <a:spcPts val="600"/>
+                <a:spcPts val="500"/>
               </a:spcAft>
-              <a:defRPr sz="1250">
-                <a:solidFill>
-                  <a:srgbClr val="1E293B"/>
-                </a:solidFill>
-              </a:defRPr>
-            </a:pPr>
-            <a:r>
-              <a:t>• Condition: Real-world physical channel with Gaussian thermal noise</a:t>
+              <a:defRPr sz="1200">
+                <a:solidFill>
+                  <a:srgbClr val="0F172A"/>
+                </a:solidFill>
+              </a:defRPr>
+            </a:pPr>
+            <a:r>
+              <a:t>• Formulated By: Claude Shannon (1948)</a:t>
             </a:r>
           </a:p>
           <a:p>
             <a:pPr>
               <a:spcAft>
-                <a:spcPts val="600"/>
+                <a:spcPts val="500"/>
               </a:spcAft>
-              <a:defRPr sz="1250">
-                <a:solidFill>
-                  <a:srgbClr val="1E293B"/>
-                </a:solidFill>
-              </a:defRPr>
-            </a:pPr>
-            <a:r>
-              <a:t>• Signal-to-Noise: $\text{SNR} = \frac{\text{Signal Power}}{\text{Noise Power}}$ (Linear scale)</a:t>
+              <a:defRPr sz="1200">
+                <a:solidFill>
+                  <a:srgbClr val="0F172A"/>
+                </a:solidFill>
+              </a:defRPr>
+            </a:pPr>
+            <a:r>
+              <a:t>• Channel Condition: Assumes real-world channel contaminated with Thermal White Noise (Gaussian Noise)</a:t>
             </a:r>
           </a:p>
           <a:p>
             <a:pPr>
               <a:spcAft>
-                <a:spcPts val="600"/>
+                <a:spcPts val="500"/>
               </a:spcAft>
-              <a:defRPr sz="1250">
-                <a:solidFill>
-                  <a:srgbClr val="1E293B"/>
-                </a:solidFill>
-              </a:defRPr>
-            </a:pPr>
-            <a:r>
-              <a:t>• Formula: $\text{Capacity } C = B \times \log_2(1 + \text{SNR}) \text{ bps}$</a:t>
+              <a:defRPr sz="1200">
+                <a:solidFill>
+                  <a:srgbClr val="0F172A"/>
+                </a:solidFill>
+              </a:defRPr>
+            </a:pPr>
+            <a:r>
+              <a:t>• Formula: $C = B \times \log_2 (1 + SNR)$ bps</a:t>
             </a:r>
           </a:p>
           <a:p>
             <a:pPr>
               <a:spcAft>
-                <a:spcPts val="600"/>
+                <a:spcPts val="500"/>
               </a:spcAft>
-              <a:defRPr sz="1250">
-                <a:solidFill>
-                  <a:srgbClr val="1E293B"/>
-                </a:solidFill>
-              </a:defRPr>
-            </a:pPr>
-            <a:r>
-              <a:t>• Example: $B = 3000\text{ Hz}, \text{SNR}_{\text{dB}} = 30\text{ dB} \implies \text{SNR} = 1000$ $\implies C = 3000 \times \log_2(1001) \approx 29,887\text{ bps}$</a:t>
-            </a:r>
-          </a:p>
-          <a:p>
-            <a:pPr>
-              <a:spcAft>
-                <a:spcPts val="600"/>
-              </a:spcAft>
-              <a:defRPr sz="1250">
-                <a:solidFill>
-                  <a:srgbClr val="1E293B"/>
-                </a:solidFill>
-              </a:defRPr>
-            </a:pPr>
-            <a:r>
-              <a:t>• Significance: Absolute theoretical upper bound regardless of signal levels $L$</a:t>
+              <a:defRPr sz="1200">
+                <a:solidFill>
+                  <a:srgbClr val="0F172A"/>
+                </a:solidFill>
+              </a:defRPr>
+            </a:pPr>
+            <a:r>
+              <a:t>• Implication: Defines the absolute physical upper bound on error-free channel capacity regardless of how many signal levels $L$ are used</a:t>
             </a:r>
           </a:p>
         </p:txBody>
@@ -4306,8 +4421,8 @@
         </p:nvSpPr>
         <p:spPr>
           <a:xfrm>
-            <a:off x="731520" y="6309360"/>
-            <a:ext cx="10789920" cy="365760"/>
+            <a:off x="731520" y="6327648"/>
+            <a:ext cx="10789920" cy="320040"/>
           </a:xfrm>
           <a:prstGeom prst="rect">
             <a:avLst/>
@@ -4329,6 +4444,1128 @@
             </a:pPr>
             <a:r>
               <a:t>PCCST501 Computer Networks | KTU 2024 Scheme | Prof. Anju Markose | Assistant Professor, Dept. of CSE | VJCET</a:t>
+            </a:r>
+          </a:p>
+        </p:txBody>
+      </p:sp>
+      <p:sp>
+        <p:nvSpPr>
+          <p:cNvPr id="11" name="TextBox 10"/>
+          <p:cNvSpPr txBox="1"/>
+          <p:nvPr/>
+        </p:nvSpPr>
+        <p:spPr>
+          <a:xfrm>
+            <a:off x="6858000" y="6327648"/>
+            <a:ext cx="4572000" cy="320040"/>
+          </a:xfrm>
+          <a:prstGeom prst="rect">
+            <a:avLst/>
+          </a:prstGeom>
+          <a:noFill/>
+        </p:spPr>
+        <p:txBody>
+          <a:bodyPr wrap="none">
+            <a:spAutoFit/>
+          </a:bodyPr>
+          <a:lstStyle/>
+          <a:p>
+            <a:pPr algn="r">
+              <a:defRPr sz="950">
+                <a:solidFill>
+                  <a:srgbClr val="64748B"/>
+                </a:solidFill>
+              </a:defRPr>
+            </a:pPr>
+            <a:r>
+              <a:t>Dept. of CSE, VJCET</a:t>
+            </a:r>
+          </a:p>
+        </p:txBody>
+      </p:sp>
+    </p:spTree>
+  </p:cSld>
+  <p:clrMapOvr>
+    <a:masterClrMapping/>
+  </p:clrMapOvr>
+</p:sld>
+</file>
+
+<file path=ppt/slides/slide4.xml><?xml version="1.0" encoding="utf-8"?>
+<p:sld xmlns:a="http://schemas.openxmlformats.org/drawingml/2006/main" xmlns:p="http://schemas.openxmlformats.org/presentationml/2006/main" xmlns:r="http://schemas.openxmlformats.org/officeDocument/2006/relationships">
+  <p:cSld>
+    <p:spTree>
+      <p:nvGrpSpPr>
+        <p:cNvPr id="1" name=""/>
+        <p:cNvGrpSpPr/>
+        <p:nvPr/>
+      </p:nvGrpSpPr>
+      <p:grpSpPr/>
+      <p:sp>
+        <p:nvSpPr>
+          <p:cNvPr id="2" name="Rectangle 1"/>
+          <p:cNvSpPr/>
+          <p:nvPr/>
+        </p:nvSpPr>
+        <p:spPr>
+          <a:xfrm>
+            <a:off x="0" y="0"/>
+            <a:ext cx="12191695" cy="1005840"/>
+          </a:xfrm>
+          <a:prstGeom prst="rect">
+            <a:avLst/>
+          </a:prstGeom>
+          <a:solidFill>
+            <a:srgbClr val="0F1E4A"/>
+          </a:solidFill>
+          <a:ln>
+            <a:noFill/>
+          </a:ln>
+        </p:spPr>
+        <p:style>
+          <a:lnRef idx="1">
+            <a:schemeClr val="accent1"/>
+          </a:lnRef>
+          <a:fillRef idx="3">
+            <a:schemeClr val="accent1"/>
+          </a:fillRef>
+          <a:effectRef idx="2">
+            <a:schemeClr val="accent1"/>
+          </a:effectRef>
+          <a:fontRef idx="minor">
+            <a:schemeClr val="lt1"/>
+          </a:fontRef>
+        </p:style>
+        <p:txBody>
+          <a:bodyPr rtlCol="0" anchor="ctr"/>
+          <a:lstStyle/>
+          <a:p>
+            <a:pPr algn="ctr"/>
+          </a:p>
+        </p:txBody>
+      </p:sp>
+      <p:sp>
+        <p:nvSpPr>
+          <p:cNvPr id="3" name="Rectangle 2"/>
+          <p:cNvSpPr/>
+          <p:nvPr/>
+        </p:nvSpPr>
+        <p:spPr>
+          <a:xfrm>
+            <a:off x="0" y="969264"/>
+            <a:ext cx="12191695" cy="36576"/>
+          </a:xfrm>
+          <a:prstGeom prst="rect">
+            <a:avLst/>
+          </a:prstGeom>
+          <a:solidFill>
+            <a:srgbClr val="D97706"/>
+          </a:solidFill>
+          <a:ln>
+            <a:noFill/>
+          </a:ln>
+        </p:spPr>
+        <p:style>
+          <a:lnRef idx="1">
+            <a:schemeClr val="accent1"/>
+          </a:lnRef>
+          <a:fillRef idx="3">
+            <a:schemeClr val="accent1"/>
+          </a:fillRef>
+          <a:effectRef idx="2">
+            <a:schemeClr val="accent1"/>
+          </a:effectRef>
+          <a:fontRef idx="minor">
+            <a:schemeClr val="lt1"/>
+          </a:fontRef>
+        </p:style>
+        <p:txBody>
+          <a:bodyPr rtlCol="0" anchor="ctr"/>
+          <a:lstStyle/>
+          <a:p>
+            <a:pPr algn="ctr"/>
+          </a:p>
+        </p:txBody>
+      </p:sp>
+      <p:sp>
+        <p:nvSpPr>
+          <p:cNvPr id="4" name="TextBox 3"/>
+          <p:cNvSpPr txBox="1"/>
+          <p:nvPr/>
+        </p:nvSpPr>
+        <p:spPr>
+          <a:xfrm>
+            <a:off x="731520" y="164592"/>
+            <a:ext cx="8412480" cy="685800"/>
+          </a:xfrm>
+          <a:prstGeom prst="rect">
+            <a:avLst/>
+          </a:prstGeom>
+          <a:noFill/>
+        </p:spPr>
+        <p:txBody>
+          <a:bodyPr wrap="none">
+            <a:spAutoFit/>
+          </a:bodyPr>
+          <a:lstStyle/>
+          <a:p>
+            <a:pPr>
+              <a:defRPr b="1" sz="2200">
+                <a:solidFill>
+                  <a:srgbClr val="F8FAFC"/>
+                </a:solidFill>
+              </a:defRPr>
+            </a:pPr>
+            <a:r>
+              <a:t>4.3.3 Worked KTU Numerical: Nyquist &amp; Shannon Capacity</a:t>
+            </a:r>
+          </a:p>
+        </p:txBody>
+      </p:sp>
+      <p:sp>
+        <p:nvSpPr>
+          <p:cNvPr id="5" name="TextBox 4"/>
+          <p:cNvSpPr txBox="1"/>
+          <p:nvPr/>
+        </p:nvSpPr>
+        <p:spPr>
+          <a:xfrm>
+            <a:off x="8229600" y="164592"/>
+            <a:ext cx="3291840" cy="685800"/>
+          </a:xfrm>
+          <a:prstGeom prst="rect">
+            <a:avLst/>
+          </a:prstGeom>
+          <a:noFill/>
+        </p:spPr>
+        <p:txBody>
+          <a:bodyPr wrap="none">
+            <a:spAutoFit/>
+          </a:bodyPr>
+          <a:lstStyle/>
+          <a:p>
+            <a:pPr algn="r">
+              <a:defRPr b="1" sz="1300">
+                <a:solidFill>
+                  <a:srgbClr val="D97706"/>
+                </a:solidFill>
+              </a:defRPr>
+            </a:pPr>
+            <a:r>
+              <a:t>M4.3 CAPACITY NUMERICAL</a:t>
+            </a:r>
+          </a:p>
+        </p:txBody>
+      </p:sp>
+      <p:sp>
+        <p:nvSpPr>
+          <p:cNvPr id="6" name="Rounded Rectangle 5"/>
+          <p:cNvSpPr/>
+          <p:nvPr/>
+        </p:nvSpPr>
+        <p:spPr>
+          <a:xfrm>
+            <a:off x="731520" y="1234440"/>
+            <a:ext cx="5486400" cy="4892040"/>
+          </a:xfrm>
+          <a:prstGeom prst="roundRect">
+            <a:avLst/>
+          </a:prstGeom>
+          <a:solidFill>
+            <a:srgbClr val="F8FAFC"/>
+          </a:solidFill>
+          <a:ln w="19050">
+            <a:solidFill>
+              <a:srgbClr val="0F1E4A"/>
+            </a:solidFill>
+          </a:ln>
+        </p:spPr>
+        <p:style>
+          <a:lnRef idx="1">
+            <a:schemeClr val="accent1"/>
+          </a:lnRef>
+          <a:fillRef idx="3">
+            <a:schemeClr val="accent1"/>
+          </a:fillRef>
+          <a:effectRef idx="2">
+            <a:schemeClr val="accent1"/>
+          </a:effectRef>
+          <a:fontRef idx="minor">
+            <a:schemeClr val="lt1"/>
+          </a:fontRef>
+        </p:style>
+        <p:txBody>
+          <a:bodyPr rtlCol="0" anchor="ctr"/>
+          <a:lstStyle/>
+          <a:p>
+            <a:pPr algn="ctr"/>
+          </a:p>
+        </p:txBody>
+      </p:sp>
+      <p:sp>
+        <p:nvSpPr>
+          <p:cNvPr id="7" name="TextBox 6"/>
+          <p:cNvSpPr txBox="1"/>
+          <p:nvPr/>
+        </p:nvSpPr>
+        <p:spPr>
+          <a:xfrm>
+            <a:off x="914400" y="1371600"/>
+            <a:ext cx="5120640" cy="4572000"/>
+          </a:xfrm>
+          <a:prstGeom prst="rect">
+            <a:avLst/>
+          </a:prstGeom>
+          <a:noFill/>
+        </p:spPr>
+        <p:txBody>
+          <a:bodyPr wrap="square">
+            <a:spAutoFit/>
+          </a:bodyPr>
+          <a:lstStyle/>
+          <a:p>
+            <a:pPr>
+              <a:spcAft>
+                <a:spcPts val="800"/>
+              </a:spcAft>
+              <a:defRPr b="1" sz="1450">
+                <a:solidFill>
+                  <a:srgbClr val="0F1E4A"/>
+                </a:solidFill>
+              </a:defRPr>
+            </a:pPr>
+            <a:r>
+              <a:t>📌 KTU Numerical Problem Statement</a:t>
+            </a:r>
+          </a:p>
+          <a:p>
+            <a:pPr>
+              <a:spcAft>
+                <a:spcPts val="1400"/>
+              </a:spcAft>
+              <a:defRPr sz="1250">
+                <a:solidFill>
+                  <a:srgbClr val="0F172A"/>
+                </a:solidFill>
+              </a:defRPr>
+            </a:pPr>
+            <a:r>
+              <a:t>A telephone line has bandwidth B = 3000 Hz and Signal-to-Noise ratio SNR_dB = 31.62 dB (SNR approx 1452). (a) Calculate the theoretical maximum Shannon channel capacity. (b) To achieve this capacity on a noiseless line with B = 3000 Hz, how many signal levels L are required by Nyquist formula?</a:t>
+            </a:r>
+          </a:p>
+          <a:p>
+            <a:pPr>
+              <a:spcAft>
+                <a:spcPts val="600"/>
+              </a:spcAft>
+              <a:defRPr b="1" sz="1350">
+                <a:solidFill>
+                  <a:srgbClr val="0E7490"/>
+                </a:solidFill>
+              </a:defRPr>
+            </a:pPr>
+            <a:r>
+              <a:t>📐 Governing Formulas &amp; Principles:</a:t>
+            </a:r>
+          </a:p>
+          <a:p>
+            <a:pPr>
+              <a:spcAft>
+                <a:spcPts val="400"/>
+              </a:spcAft>
+              <a:defRPr sz="1200">
+                <a:solidFill>
+                  <a:srgbClr val="0F172A"/>
+                </a:solidFill>
+              </a:defRPr>
+            </a:pPr>
+            <a:r>
+              <a:t>• Shannon Capacity: C = B * log2(1 + SNR) bps</a:t>
+            </a:r>
+          </a:p>
+          <a:p>
+            <a:pPr>
+              <a:spcAft>
+                <a:spcPts val="400"/>
+              </a:spcAft>
+              <a:defRPr sz="1200">
+                <a:solidFill>
+                  <a:srgbClr val="0F172A"/>
+                </a:solidFill>
+              </a:defRPr>
+            </a:pPr>
+            <a:r>
+              <a:t>• Given SNR_dB = 31.62 dB -&gt; SNR = 10^(31.62 / 10) = 10^3.162 = 1452.1</a:t>
+            </a:r>
+          </a:p>
+          <a:p>
+            <a:pPr>
+              <a:spcAft>
+                <a:spcPts val="400"/>
+              </a:spcAft>
+              <a:defRPr sz="1200">
+                <a:solidFill>
+                  <a:srgbClr val="0F172A"/>
+                </a:solidFill>
+              </a:defRPr>
+            </a:pPr>
+            <a:r>
+              <a:t>• Nyquist Bit Rate: C = 2 * B * log2(L) bps -&gt; log2(L) = C / (2 * B) -&gt; L = 2^(C / 2B).</a:t>
+            </a:r>
+          </a:p>
+        </p:txBody>
+      </p:sp>
+      <p:sp>
+        <p:nvSpPr>
+          <p:cNvPr id="8" name="Rounded Rectangle 7"/>
+          <p:cNvSpPr/>
+          <p:nvPr/>
+        </p:nvSpPr>
+        <p:spPr>
+          <a:xfrm>
+            <a:off x="6492240" y="1234440"/>
+            <a:ext cx="5029200" cy="4892040"/>
+          </a:xfrm>
+          <a:prstGeom prst="roundRect">
+            <a:avLst/>
+          </a:prstGeom>
+          <a:solidFill>
+            <a:srgbClr val="ECFDF5"/>
+          </a:solidFill>
+          <a:ln w="19050">
+            <a:solidFill>
+              <a:srgbClr val="10B981"/>
+            </a:solidFill>
+          </a:ln>
+        </p:spPr>
+        <p:style>
+          <a:lnRef idx="1">
+            <a:schemeClr val="accent1"/>
+          </a:lnRef>
+          <a:fillRef idx="3">
+            <a:schemeClr val="accent1"/>
+          </a:fillRef>
+          <a:effectRef idx="2">
+            <a:schemeClr val="accent1"/>
+          </a:effectRef>
+          <a:fontRef idx="minor">
+            <a:schemeClr val="lt1"/>
+          </a:fontRef>
+        </p:style>
+        <p:txBody>
+          <a:bodyPr rtlCol="0" anchor="ctr"/>
+          <a:lstStyle/>
+          <a:p>
+            <a:pPr algn="ctr"/>
+          </a:p>
+        </p:txBody>
+      </p:sp>
+      <p:sp>
+        <p:nvSpPr>
+          <p:cNvPr id="9" name="TextBox 8"/>
+          <p:cNvSpPr txBox="1"/>
+          <p:nvPr/>
+        </p:nvSpPr>
+        <p:spPr>
+          <a:xfrm>
+            <a:off x="6675120" y="1371600"/>
+            <a:ext cx="4663440" cy="4572000"/>
+          </a:xfrm>
+          <a:prstGeom prst="rect">
+            <a:avLst/>
+          </a:prstGeom>
+          <a:noFill/>
+        </p:spPr>
+        <p:txBody>
+          <a:bodyPr wrap="square">
+            <a:spAutoFit/>
+          </a:bodyPr>
+          <a:lstStyle/>
+          <a:p>
+            <a:pPr>
+              <a:spcAft>
+                <a:spcPts val="800"/>
+              </a:spcAft>
+              <a:defRPr b="1" sz="1450">
+                <a:solidFill>
+                  <a:srgbClr val="047857"/>
+                </a:solidFill>
+              </a:defRPr>
+            </a:pPr>
+            <a:r>
+              <a:t>📝 Step-by-Step Derivation &amp; Solution</a:t>
+            </a:r>
+          </a:p>
+          <a:p>
+            <a:pPr>
+              <a:spcAft>
+                <a:spcPts val="500"/>
+              </a:spcAft>
+              <a:defRPr sz="1200">
+                <a:solidFill>
+                  <a:srgbClr val="0F172A"/>
+                </a:solidFill>
+              </a:defRPr>
+            </a:pPr>
+            <a:r>
+              <a:t>Step 1: 1 + SNR = 1 + 1452.1 = 1453.1</a:t>
+            </a:r>
+          </a:p>
+          <a:p>
+            <a:pPr>
+              <a:spcAft>
+                <a:spcPts val="500"/>
+              </a:spcAft>
+              <a:defRPr sz="1200">
+                <a:solidFill>
+                  <a:srgbClr val="0F172A"/>
+                </a:solidFill>
+              </a:defRPr>
+            </a:pPr>
+            <a:r>
+              <a:t>Step 2: log2(1453.1) = log10(1453.1) / log10(2) = 3.1623 / 0.30103 = 10.505 bits</a:t>
+            </a:r>
+          </a:p>
+          <a:p>
+            <a:pPr>
+              <a:spcAft>
+                <a:spcPts val="500"/>
+              </a:spcAft>
+              <a:defRPr sz="1200">
+                <a:solidFill>
+                  <a:srgbClr val="0F172A"/>
+                </a:solidFill>
+              </a:defRPr>
+            </a:pPr>
+            <a:r>
+              <a:t>Step 3: Shannon Capacity C = 3000 Hz * 10.505 = 31,515 bps (approx 31.5 kbps).</a:t>
+            </a:r>
+          </a:p>
+          <a:p>
+            <a:pPr>
+              <a:spcAft>
+                <a:spcPts val="500"/>
+              </a:spcAft>
+              <a:defRPr sz="1200">
+                <a:solidFill>
+                  <a:srgbClr val="0F172A"/>
+                </a:solidFill>
+              </a:defRPr>
+            </a:pPr>
+            <a:r>
+              <a:t>Step 4: Equating to Nyquist: 31,515 = 2 * 3000 * log2(L) = 6000 * log2(L)</a:t>
+            </a:r>
+          </a:p>
+          <a:p>
+            <a:pPr>
+              <a:spcAft>
+                <a:spcPts val="500"/>
+              </a:spcAft>
+              <a:defRPr sz="1200">
+                <a:solidFill>
+                  <a:srgbClr val="0F172A"/>
+                </a:solidFill>
+              </a:defRPr>
+            </a:pPr>
+            <a:r>
+              <a:t>Step 5: log2(L) = 31,515 / 6000 = 5.2525 -&gt; L = 2^5.2525 = 38.12 -&gt; L = 38 signal levels.</a:t>
+            </a:r>
+          </a:p>
+          <a:p>
+            <a:pPr>
+              <a:spcAft>
+                <a:spcPts val="800"/>
+              </a:spcAft>
+              <a:defRPr b="1" sz="1300">
+                <a:solidFill>
+                  <a:srgbClr val="047857"/>
+                </a:solidFill>
+              </a:defRPr>
+            </a:pPr>
+            <a:r>
+              <a:t>✅ FINAL ANSWER: Shannon Capacity C = 31.5 kbps | Required Nyquist signal levels L = 38</a:t>
+            </a:r>
+          </a:p>
+          <a:p>
+            <a:pPr>
+              <a:defRPr sz="1100">
+                <a:solidFill>
+                  <a:srgbClr val="64748B"/>
+                </a:solidFill>
+              </a:defRPr>
+            </a:pPr>
+            <a:r>
+              <a:t>💡 Exam Tip: Shannon determines the upper capacity limit; Nyquist tells us how many signal levels L are required to realize it.</a:t>
+            </a:r>
+          </a:p>
+        </p:txBody>
+      </p:sp>
+      <p:sp>
+        <p:nvSpPr>
+          <p:cNvPr id="10" name="TextBox 9"/>
+          <p:cNvSpPr txBox="1"/>
+          <p:nvPr/>
+        </p:nvSpPr>
+        <p:spPr>
+          <a:xfrm>
+            <a:off x="731520" y="6327648"/>
+            <a:ext cx="10789920" cy="320040"/>
+          </a:xfrm>
+          <a:prstGeom prst="rect">
+            <a:avLst/>
+          </a:prstGeom>
+          <a:noFill/>
+        </p:spPr>
+        <p:txBody>
+          <a:bodyPr wrap="none">
+            <a:spAutoFit/>
+          </a:bodyPr>
+          <a:lstStyle/>
+          <a:p>
+            <a:pPr>
+              <a:defRPr sz="950">
+                <a:solidFill>
+                  <a:srgbClr val="64748B"/>
+                </a:solidFill>
+              </a:defRPr>
+            </a:pPr>
+            <a:r>
+              <a:t>PCCST501 Computer Networks | KTU 2024 Scheme | Prof. Anju Markose | Assistant Professor, Dept. of CSE | VJCET</a:t>
+            </a:r>
+          </a:p>
+        </p:txBody>
+      </p:sp>
+      <p:sp>
+        <p:nvSpPr>
+          <p:cNvPr id="11" name="TextBox 10"/>
+          <p:cNvSpPr txBox="1"/>
+          <p:nvPr/>
+        </p:nvSpPr>
+        <p:spPr>
+          <a:xfrm>
+            <a:off x="6858000" y="6327648"/>
+            <a:ext cx="4572000" cy="320040"/>
+          </a:xfrm>
+          <a:prstGeom prst="rect">
+            <a:avLst/>
+          </a:prstGeom>
+          <a:noFill/>
+        </p:spPr>
+        <p:txBody>
+          <a:bodyPr wrap="none">
+            <a:spAutoFit/>
+          </a:bodyPr>
+          <a:lstStyle/>
+          <a:p>
+            <a:pPr algn="r">
+              <a:defRPr sz="950">
+                <a:solidFill>
+                  <a:srgbClr val="64748B"/>
+                </a:solidFill>
+              </a:defRPr>
+            </a:pPr>
+            <a:r>
+              <a:t>Dept. of CSE, VJCET</a:t>
+            </a:r>
+          </a:p>
+        </p:txBody>
+      </p:sp>
+    </p:spTree>
+  </p:cSld>
+  <p:clrMapOvr>
+    <a:masterClrMapping/>
+  </p:clrMapOvr>
+</p:sld>
+</file>
+
+<file path=ppt/slides/slide5.xml><?xml version="1.0" encoding="utf-8"?>
+<p:sld xmlns:a="http://schemas.openxmlformats.org/drawingml/2006/main" xmlns:p="http://schemas.openxmlformats.org/presentationml/2006/main" xmlns:r="http://schemas.openxmlformats.org/officeDocument/2006/relationships">
+  <p:cSld>
+    <p:spTree>
+      <p:nvGrpSpPr>
+        <p:cNvPr id="1" name=""/>
+        <p:cNvGrpSpPr/>
+        <p:nvPr/>
+      </p:nvGrpSpPr>
+      <p:grpSpPr/>
+      <p:sp>
+        <p:nvSpPr>
+          <p:cNvPr id="2" name="Rectangle 1"/>
+          <p:cNvSpPr/>
+          <p:nvPr/>
+        </p:nvSpPr>
+        <p:spPr>
+          <a:xfrm>
+            <a:off x="0" y="0"/>
+            <a:ext cx="12191695" cy="1005840"/>
+          </a:xfrm>
+          <a:prstGeom prst="rect">
+            <a:avLst/>
+          </a:prstGeom>
+          <a:solidFill>
+            <a:srgbClr val="0F1E4A"/>
+          </a:solidFill>
+          <a:ln>
+            <a:noFill/>
+          </a:ln>
+        </p:spPr>
+        <p:style>
+          <a:lnRef idx="1">
+            <a:schemeClr val="accent1"/>
+          </a:lnRef>
+          <a:fillRef idx="3">
+            <a:schemeClr val="accent1"/>
+          </a:fillRef>
+          <a:effectRef idx="2">
+            <a:schemeClr val="accent1"/>
+          </a:effectRef>
+          <a:fontRef idx="minor">
+            <a:schemeClr val="lt1"/>
+          </a:fontRef>
+        </p:style>
+        <p:txBody>
+          <a:bodyPr rtlCol="0" anchor="ctr"/>
+          <a:lstStyle/>
+          <a:p>
+            <a:pPr algn="ctr"/>
+          </a:p>
+        </p:txBody>
+      </p:sp>
+      <p:sp>
+        <p:nvSpPr>
+          <p:cNvPr id="3" name="Rectangle 2"/>
+          <p:cNvSpPr/>
+          <p:nvPr/>
+        </p:nvSpPr>
+        <p:spPr>
+          <a:xfrm>
+            <a:off x="0" y="969264"/>
+            <a:ext cx="12191695" cy="36576"/>
+          </a:xfrm>
+          <a:prstGeom prst="rect">
+            <a:avLst/>
+          </a:prstGeom>
+          <a:solidFill>
+            <a:srgbClr val="D97706"/>
+          </a:solidFill>
+          <a:ln>
+            <a:noFill/>
+          </a:ln>
+        </p:spPr>
+        <p:style>
+          <a:lnRef idx="1">
+            <a:schemeClr val="accent1"/>
+          </a:lnRef>
+          <a:fillRef idx="3">
+            <a:schemeClr val="accent1"/>
+          </a:fillRef>
+          <a:effectRef idx="2">
+            <a:schemeClr val="accent1"/>
+          </a:effectRef>
+          <a:fontRef idx="minor">
+            <a:schemeClr val="lt1"/>
+          </a:fontRef>
+        </p:style>
+        <p:txBody>
+          <a:bodyPr rtlCol="0" anchor="ctr"/>
+          <a:lstStyle/>
+          <a:p>
+            <a:pPr algn="ctr"/>
+          </a:p>
+        </p:txBody>
+      </p:sp>
+      <p:sp>
+        <p:nvSpPr>
+          <p:cNvPr id="4" name="TextBox 3"/>
+          <p:cNvSpPr txBox="1"/>
+          <p:nvPr/>
+        </p:nvSpPr>
+        <p:spPr>
+          <a:xfrm>
+            <a:off x="731520" y="164592"/>
+            <a:ext cx="8412480" cy="685800"/>
+          </a:xfrm>
+          <a:prstGeom prst="rect">
+            <a:avLst/>
+          </a:prstGeom>
+          <a:noFill/>
+        </p:spPr>
+        <p:txBody>
+          <a:bodyPr wrap="none">
+            <a:spAutoFit/>
+          </a:bodyPr>
+          <a:lstStyle/>
+          <a:p>
+            <a:pPr>
+              <a:defRPr b="1" sz="2100">
+                <a:solidFill>
+                  <a:srgbClr val="F8FAFC"/>
+                </a:solidFill>
+              </a:defRPr>
+            </a:pPr>
+            <a:r>
+              <a:t>🎯 Exam Booster &amp; Review: Channel Capacity &amp; Signals</a:t>
+            </a:r>
+          </a:p>
+        </p:txBody>
+      </p:sp>
+      <p:sp>
+        <p:nvSpPr>
+          <p:cNvPr id="5" name="TextBox 4"/>
+          <p:cNvSpPr txBox="1"/>
+          <p:nvPr/>
+        </p:nvSpPr>
+        <p:spPr>
+          <a:xfrm>
+            <a:off x="8229600" y="164592"/>
+            <a:ext cx="3291840" cy="685800"/>
+          </a:xfrm>
+          <a:prstGeom prst="rect">
+            <a:avLst/>
+          </a:prstGeom>
+          <a:noFill/>
+        </p:spPr>
+        <p:txBody>
+          <a:bodyPr wrap="none">
+            <a:spAutoFit/>
+          </a:bodyPr>
+          <a:lstStyle/>
+          <a:p>
+            <a:pPr algn="r">
+              <a:defRPr b="1" sz="1300">
+                <a:solidFill>
+                  <a:srgbClr val="D97706"/>
+                </a:solidFill>
+              </a:defRPr>
+            </a:pPr>
+            <a:r>
+              <a:t>M4.3</a:t>
+            </a:r>
+          </a:p>
+        </p:txBody>
+      </p:sp>
+      <p:sp>
+        <p:nvSpPr>
+          <p:cNvPr id="6" name="Rounded Rectangle 5"/>
+          <p:cNvSpPr/>
+          <p:nvPr/>
+        </p:nvSpPr>
+        <p:spPr>
+          <a:xfrm>
+            <a:off x="731520" y="1234440"/>
+            <a:ext cx="5303520" cy="4892040"/>
+          </a:xfrm>
+          <a:prstGeom prst="roundRect">
+            <a:avLst/>
+          </a:prstGeom>
+          <a:solidFill>
+            <a:srgbClr val="FEF3C7"/>
+          </a:solidFill>
+          <a:ln w="19050">
+            <a:solidFill>
+              <a:srgbClr val="D97706"/>
+            </a:solidFill>
+          </a:ln>
+        </p:spPr>
+        <p:style>
+          <a:lnRef idx="1">
+            <a:schemeClr val="accent1"/>
+          </a:lnRef>
+          <a:fillRef idx="3">
+            <a:schemeClr val="accent1"/>
+          </a:fillRef>
+          <a:effectRef idx="2">
+            <a:schemeClr val="accent1"/>
+          </a:effectRef>
+          <a:fontRef idx="minor">
+            <a:schemeClr val="lt1"/>
+          </a:fontRef>
+        </p:style>
+        <p:txBody>
+          <a:bodyPr rtlCol="0" anchor="ctr"/>
+          <a:lstStyle/>
+          <a:p>
+            <a:pPr algn="ctr"/>
+          </a:p>
+        </p:txBody>
+      </p:sp>
+      <p:sp>
+        <p:nvSpPr>
+          <p:cNvPr id="7" name="TextBox 6"/>
+          <p:cNvSpPr txBox="1"/>
+          <p:nvPr/>
+        </p:nvSpPr>
+        <p:spPr>
+          <a:xfrm>
+            <a:off x="914400" y="1371600"/>
+            <a:ext cx="4937760" cy="4572000"/>
+          </a:xfrm>
+          <a:prstGeom prst="rect">
+            <a:avLst/>
+          </a:prstGeom>
+          <a:noFill/>
+        </p:spPr>
+        <p:txBody>
+          <a:bodyPr wrap="square">
+            <a:spAutoFit/>
+          </a:bodyPr>
+          <a:lstStyle/>
+          <a:p>
+            <a:pPr>
+              <a:spcAft>
+                <a:spcPts val="1000"/>
+              </a:spcAft>
+              <a:defRPr b="1" sz="1450">
+                <a:solidFill>
+                  <a:srgbClr val="D97706"/>
+                </a:solidFill>
+              </a:defRPr>
+            </a:pPr>
+            <a:r>
+              <a:t>📚 KTU High-Yield Questions (K3 Apply)</a:t>
+            </a:r>
+          </a:p>
+          <a:p>
+            <a:pPr>
+              <a:spcAft>
+                <a:spcPts val="700"/>
+              </a:spcAft>
+              <a:defRPr sz="1200">
+                <a:solidFill>
+                  <a:srgbClr val="0F172A"/>
+                </a:solidFill>
+              </a:defRPr>
+            </a:pPr>
+            <a:r>
+              <a:t>Q: Explain the three transmission impairments: Attenuation, Distortion, and Noise with diagrams and formulas. (7 Marks)</a:t>
+            </a:r>
+          </a:p>
+          <a:p>
+            <a:pPr>
+              <a:spcAft>
+                <a:spcPts val="700"/>
+              </a:spcAft>
+              <a:defRPr sz="1200">
+                <a:solidFill>
+                  <a:srgbClr val="0F172A"/>
+                </a:solidFill>
+              </a:defRPr>
+            </a:pPr>
+            <a:r>
+              <a:t>Q: State and derive the Nyquist Bit Rate formula for noiseless channels and Shannon Capacity theorem for noisy channels. (8 Marks)</a:t>
+            </a:r>
+          </a:p>
+          <a:p>
+            <a:pPr>
+              <a:spcAft>
+                <a:spcPts val="700"/>
+              </a:spcAft>
+              <a:defRPr sz="1200">
+                <a:solidFill>
+                  <a:srgbClr val="0F172A"/>
+                </a:solidFill>
+              </a:defRPr>
+            </a:pPr>
+            <a:r>
+              <a:t>Q: A channel has bandwidth B = 4 kHz. Calculate Shannon capacity if SNR_dB = 20 dB. (5 Marks)</a:t>
+            </a:r>
+          </a:p>
+        </p:txBody>
+      </p:sp>
+      <p:sp>
+        <p:nvSpPr>
+          <p:cNvPr id="8" name="Rounded Rectangle 7"/>
+          <p:cNvSpPr/>
+          <p:nvPr/>
+        </p:nvSpPr>
+        <p:spPr>
+          <a:xfrm>
+            <a:off x="6309360" y="1234440"/>
+            <a:ext cx="5212080" cy="4892040"/>
+          </a:xfrm>
+          <a:prstGeom prst="roundRect">
+            <a:avLst/>
+          </a:prstGeom>
+          <a:solidFill>
+            <a:srgbClr val="EEF2FF"/>
+          </a:solidFill>
+          <a:ln w="19050">
+            <a:solidFill>
+              <a:srgbClr val="0E7490"/>
+            </a:solidFill>
+          </a:ln>
+        </p:spPr>
+        <p:style>
+          <a:lnRef idx="1">
+            <a:schemeClr val="accent1"/>
+          </a:lnRef>
+          <a:fillRef idx="3">
+            <a:schemeClr val="accent1"/>
+          </a:fillRef>
+          <a:effectRef idx="2">
+            <a:schemeClr val="accent1"/>
+          </a:effectRef>
+          <a:fontRef idx="minor">
+            <a:schemeClr val="lt1"/>
+          </a:fontRef>
+        </p:style>
+        <p:txBody>
+          <a:bodyPr rtlCol="0" anchor="ctr"/>
+          <a:lstStyle/>
+          <a:p>
+            <a:pPr algn="ctr"/>
+          </a:p>
+        </p:txBody>
+      </p:sp>
+      <p:sp>
+        <p:nvSpPr>
+          <p:cNvPr id="9" name="TextBox 8"/>
+          <p:cNvSpPr txBox="1"/>
+          <p:nvPr/>
+        </p:nvSpPr>
+        <p:spPr>
+          <a:xfrm>
+            <a:off x="6492240" y="1371600"/>
+            <a:ext cx="4846320" cy="4572000"/>
+          </a:xfrm>
+          <a:prstGeom prst="rect">
+            <a:avLst/>
+          </a:prstGeom>
+          <a:noFill/>
+        </p:spPr>
+        <p:txBody>
+          <a:bodyPr wrap="square">
+            <a:spAutoFit/>
+          </a:bodyPr>
+          <a:lstStyle/>
+          <a:p>
+            <a:pPr>
+              <a:spcAft>
+                <a:spcPts val="1000"/>
+              </a:spcAft>
+              <a:defRPr b="1" sz="1450">
+                <a:solidFill>
+                  <a:srgbClr val="0E7490"/>
+                </a:solidFill>
+              </a:defRPr>
+            </a:pPr>
+            <a:r>
+              <a:t>💡 Critical Conceptual Takeaways</a:t>
+            </a:r>
+          </a:p>
+          <a:p>
+            <a:pPr>
+              <a:spcAft>
+                <a:spcPts val="600"/>
+              </a:spcAft>
+              <a:defRPr sz="1200">
+                <a:solidFill>
+                  <a:srgbClr val="0F172A"/>
+                </a:solidFill>
+              </a:defRPr>
+            </a:pPr>
+            <a:r>
+              <a:t>✔ Nyquist bit rate ($2B \log_2 L$) applies to ideal noiseless channels.</a:t>
+            </a:r>
+          </a:p>
+          <a:p>
+            <a:pPr>
+              <a:spcAft>
+                <a:spcPts val="600"/>
+              </a:spcAft>
+              <a:defRPr sz="1200">
+                <a:solidFill>
+                  <a:srgbClr val="0F172A"/>
+                </a:solidFill>
+              </a:defRPr>
+            </a:pPr>
+            <a:r>
+              <a:t>✔ Shannon capacity ($B \log_2(1+SNR)$) establishes the fundamental thermodynamic limit of noisy channels.</a:t>
+            </a:r>
+          </a:p>
+          <a:p>
+            <a:pPr>
+              <a:spcAft>
+                <a:spcPts val="600"/>
+              </a:spcAft>
+              <a:defRPr sz="1200">
+                <a:solidFill>
+                  <a:srgbClr val="0F172A"/>
+                </a:solidFill>
+              </a:defRPr>
+            </a:pPr>
+            <a:r>
+              <a:t>✔ Decibels convert logarithmic power ratios into simple additive terms.</a:t>
+            </a:r>
+          </a:p>
+        </p:txBody>
+      </p:sp>
+      <p:sp>
+        <p:nvSpPr>
+          <p:cNvPr id="10" name="TextBox 9"/>
+          <p:cNvSpPr txBox="1"/>
+          <p:nvPr/>
+        </p:nvSpPr>
+        <p:spPr>
+          <a:xfrm>
+            <a:off x="731520" y="6327648"/>
+            <a:ext cx="10789920" cy="320040"/>
+          </a:xfrm>
+          <a:prstGeom prst="rect">
+            <a:avLst/>
+          </a:prstGeom>
+          <a:noFill/>
+        </p:spPr>
+        <p:txBody>
+          <a:bodyPr wrap="none">
+            <a:spAutoFit/>
+          </a:bodyPr>
+          <a:lstStyle/>
+          <a:p>
+            <a:pPr>
+              <a:defRPr sz="950">
+                <a:solidFill>
+                  <a:srgbClr val="64748B"/>
+                </a:solidFill>
+              </a:defRPr>
+            </a:pPr>
+            <a:r>
+              <a:t>PCCST501 Computer Networks | KTU 2024 Scheme | Prof. Anju Markose | Assistant Professor, Dept. of CSE | VJCET</a:t>
+            </a:r>
+          </a:p>
+        </p:txBody>
+      </p:sp>
+      <p:sp>
+        <p:nvSpPr>
+          <p:cNvPr id="11" name="TextBox 10"/>
+          <p:cNvSpPr txBox="1"/>
+          <p:nvPr/>
+        </p:nvSpPr>
+        <p:spPr>
+          <a:xfrm>
+            <a:off x="6858000" y="6327648"/>
+            <a:ext cx="4572000" cy="320040"/>
+          </a:xfrm>
+          <a:prstGeom prst="rect">
+            <a:avLst/>
+          </a:prstGeom>
+          <a:noFill/>
+        </p:spPr>
+        <p:txBody>
+          <a:bodyPr wrap="none">
+            <a:spAutoFit/>
+          </a:bodyPr>
+          <a:lstStyle/>
+          <a:p>
+            <a:pPr algn="r">
+              <a:defRPr sz="950">
+                <a:solidFill>
+                  <a:srgbClr val="64748B"/>
+                </a:solidFill>
+              </a:defRPr>
+            </a:pPr>
+            <a:r>
+              <a:t>Dept. of CSE, VJCET</a:t>
             </a:r>
           </a:p>
         </p:txBody>
